--- a/Modul Minna 2/Bab 40/40. Minna 2 Tata Bahasa Bab 40 - Slide.pptx
+++ b/Modul Minna 2/Bab 40/40. Minna 2 Tata Bahasa Bab 40 - Slide.pptx
@@ -4515,7 +4515,7 @@
                 <a:ea typeface="Arial" pitchFamily="34" charset="-122"/>
                 <a:cs typeface="Arial" pitchFamily="34" charset="-120"/>
               </a:rPr>
-              <a:t>Bagaimana keadaan Sdr. Andi di sekolah, ya?</a:t>
+              <a:t>Bagaimana keadaan Andi di sekolah, ya?</a:t>
             </a:r>
             <a:endParaRPr lang="en-US" sz="950" dirty="0"/>
           </a:p>
